--- a/p02/A-frame-geometric-objects.pptx
+++ b/p02/A-frame-geometric-objects.pptx
@@ -222,7 +222,7 @@
           <a:p>
             <a:fld id="{FA1E3CD0-6E24-4AC0-945A-82AEC1490673}" type="datetimeFigureOut">
               <a:rPr lang="en-US" smtClean="0"/>
-              <a:t>1/6/2026</a:t>
+              <a:t>5/19/2026</a:t>
             </a:fld>
             <a:endParaRPr lang="en-US"/>
           </a:p>
@@ -1023,7 +1023,7 @@
           <a:p>
             <a:fld id="{846CE7D5-CF57-46EF-B807-FDD0502418D4}" type="datetimeFigureOut">
               <a:rPr lang="en-US" smtClean="0"/>
-              <a:t>1/6/2026</a:t>
+              <a:t>5/19/2026</a:t>
             </a:fld>
             <a:endParaRPr lang="en-US"/>
           </a:p>
@@ -1193,7 +1193,7 @@
           <a:p>
             <a:fld id="{846CE7D5-CF57-46EF-B807-FDD0502418D4}" type="datetimeFigureOut">
               <a:rPr lang="en-US" smtClean="0"/>
-              <a:t>1/6/2026</a:t>
+              <a:t>5/19/2026</a:t>
             </a:fld>
             <a:endParaRPr lang="en-US"/>
           </a:p>
@@ -1373,7 +1373,7 @@
           <a:p>
             <a:fld id="{846CE7D5-CF57-46EF-B807-FDD0502418D4}" type="datetimeFigureOut">
               <a:rPr lang="en-US" smtClean="0"/>
-              <a:t>1/6/2026</a:t>
+              <a:t>5/19/2026</a:t>
             </a:fld>
             <a:endParaRPr lang="en-US"/>
           </a:p>
@@ -1543,7 +1543,7 @@
           <a:p>
             <a:fld id="{846CE7D5-CF57-46EF-B807-FDD0502418D4}" type="datetimeFigureOut">
               <a:rPr lang="en-US" smtClean="0"/>
-              <a:t>1/6/2026</a:t>
+              <a:t>5/19/2026</a:t>
             </a:fld>
             <a:endParaRPr lang="en-US"/>
           </a:p>
@@ -1789,7 +1789,7 @@
           <a:p>
             <a:fld id="{846CE7D5-CF57-46EF-B807-FDD0502418D4}" type="datetimeFigureOut">
               <a:rPr lang="en-US" smtClean="0"/>
-              <a:t>1/6/2026</a:t>
+              <a:t>5/19/2026</a:t>
             </a:fld>
             <a:endParaRPr lang="en-US"/>
           </a:p>
@@ -2021,7 +2021,7 @@
           <a:p>
             <a:fld id="{846CE7D5-CF57-46EF-B807-FDD0502418D4}" type="datetimeFigureOut">
               <a:rPr lang="en-US" smtClean="0"/>
-              <a:t>1/6/2026</a:t>
+              <a:t>5/19/2026</a:t>
             </a:fld>
             <a:endParaRPr lang="en-US"/>
           </a:p>
@@ -2388,7 +2388,7 @@
           <a:p>
             <a:fld id="{846CE7D5-CF57-46EF-B807-FDD0502418D4}" type="datetimeFigureOut">
               <a:rPr lang="en-US" smtClean="0"/>
-              <a:t>1/6/2026</a:t>
+              <a:t>5/19/2026</a:t>
             </a:fld>
             <a:endParaRPr lang="en-US"/>
           </a:p>
@@ -2506,7 +2506,7 @@
           <a:p>
             <a:fld id="{846CE7D5-CF57-46EF-B807-FDD0502418D4}" type="datetimeFigureOut">
               <a:rPr lang="en-US" smtClean="0"/>
-              <a:t>1/6/2026</a:t>
+              <a:t>5/19/2026</a:t>
             </a:fld>
             <a:endParaRPr lang="en-US"/>
           </a:p>
@@ -2601,7 +2601,7 @@
           <a:p>
             <a:fld id="{846CE7D5-CF57-46EF-B807-FDD0502418D4}" type="datetimeFigureOut">
               <a:rPr lang="en-US" smtClean="0"/>
-              <a:t>1/6/2026</a:t>
+              <a:t>5/19/2026</a:t>
             </a:fld>
             <a:endParaRPr lang="en-US"/>
           </a:p>
@@ -2878,7 +2878,7 @@
           <a:p>
             <a:fld id="{846CE7D5-CF57-46EF-B807-FDD0502418D4}" type="datetimeFigureOut">
               <a:rPr lang="en-US" smtClean="0"/>
-              <a:t>1/6/2026</a:t>
+              <a:t>5/19/2026</a:t>
             </a:fld>
             <a:endParaRPr lang="en-US"/>
           </a:p>
@@ -3135,7 +3135,7 @@
           <a:p>
             <a:fld id="{846CE7D5-CF57-46EF-B807-FDD0502418D4}" type="datetimeFigureOut">
               <a:rPr lang="en-US" smtClean="0"/>
-              <a:t>1/6/2026</a:t>
+              <a:t>5/19/2026</a:t>
             </a:fld>
             <a:endParaRPr lang="en-US"/>
           </a:p>
@@ -3348,7 +3348,7 @@
           <a:p>
             <a:fld id="{846CE7D5-CF57-46EF-B807-FDD0502418D4}" type="datetimeFigureOut">
               <a:rPr lang="en-US" smtClean="0"/>
-              <a:t>1/6/2026</a:t>
+              <a:t>5/19/2026</a:t>
             </a:fld>
             <a:endParaRPr lang="en-US"/>
           </a:p>
@@ -7766,13 +7766,13 @@
           <p:nvPr/>
         </p:nvPicPr>
         <p:blipFill>
-          <a:blip r:embed="rId2">
+          <a:blip>
             <a:extLst>
               <a:ext uri="{28A0092B-C50C-407E-A947-70E740481C1C}">
                 <a14:useLocalDpi xmlns:a14="http://schemas.microsoft.com/office/drawing/2010/main" val="0"/>
               </a:ext>
               <a:ext uri="{96DAC541-7B7A-43D3-8B79-37D633B846F1}">
-                <asvg:svgBlip xmlns:asvg="http://schemas.microsoft.com/office/drawing/2016/SVG/main" r:embed="rId3"/>
+                <asvg:svgBlip xmlns:asvg="http://schemas.microsoft.com/office/drawing/2016/SVG/main" r:embed="rId2"/>
               </a:ext>
             </a:extLst>
           </a:blip>

--- a/p02/A-frame-geometric-objects.pptx
+++ b/p02/A-frame-geometric-objects.pptx
@@ -222,7 +222,7 @@
           <a:p>
             <a:fld id="{FA1E3CD0-6E24-4AC0-945A-82AEC1490673}" type="datetimeFigureOut">
               <a:rPr lang="en-US" smtClean="0"/>
-              <a:t>5/19/2026</a:t>
+              <a:t>5/20/2026</a:t>
             </a:fld>
             <a:endParaRPr lang="en-US"/>
           </a:p>
@@ -1023,7 +1023,7 @@
           <a:p>
             <a:fld id="{846CE7D5-CF57-46EF-B807-FDD0502418D4}" type="datetimeFigureOut">
               <a:rPr lang="en-US" smtClean="0"/>
-              <a:t>5/19/2026</a:t>
+              <a:t>5/20/2026</a:t>
             </a:fld>
             <a:endParaRPr lang="en-US"/>
           </a:p>
@@ -1193,7 +1193,7 @@
           <a:p>
             <a:fld id="{846CE7D5-CF57-46EF-B807-FDD0502418D4}" type="datetimeFigureOut">
               <a:rPr lang="en-US" smtClean="0"/>
-              <a:t>5/19/2026</a:t>
+              <a:t>5/20/2026</a:t>
             </a:fld>
             <a:endParaRPr lang="en-US"/>
           </a:p>
@@ -1373,7 +1373,7 @@
           <a:p>
             <a:fld id="{846CE7D5-CF57-46EF-B807-FDD0502418D4}" type="datetimeFigureOut">
               <a:rPr lang="en-US" smtClean="0"/>
-              <a:t>5/19/2026</a:t>
+              <a:t>5/20/2026</a:t>
             </a:fld>
             <a:endParaRPr lang="en-US"/>
           </a:p>
@@ -1543,7 +1543,7 @@
           <a:p>
             <a:fld id="{846CE7D5-CF57-46EF-B807-FDD0502418D4}" type="datetimeFigureOut">
               <a:rPr lang="en-US" smtClean="0"/>
-              <a:t>5/19/2026</a:t>
+              <a:t>5/20/2026</a:t>
             </a:fld>
             <a:endParaRPr lang="en-US"/>
           </a:p>
@@ -1789,7 +1789,7 @@
           <a:p>
             <a:fld id="{846CE7D5-CF57-46EF-B807-FDD0502418D4}" type="datetimeFigureOut">
               <a:rPr lang="en-US" smtClean="0"/>
-              <a:t>5/19/2026</a:t>
+              <a:t>5/20/2026</a:t>
             </a:fld>
             <a:endParaRPr lang="en-US"/>
           </a:p>
@@ -2021,7 +2021,7 @@
           <a:p>
             <a:fld id="{846CE7D5-CF57-46EF-B807-FDD0502418D4}" type="datetimeFigureOut">
               <a:rPr lang="en-US" smtClean="0"/>
-              <a:t>5/19/2026</a:t>
+              <a:t>5/20/2026</a:t>
             </a:fld>
             <a:endParaRPr lang="en-US"/>
           </a:p>
@@ -2388,7 +2388,7 @@
           <a:p>
             <a:fld id="{846CE7D5-CF57-46EF-B807-FDD0502418D4}" type="datetimeFigureOut">
               <a:rPr lang="en-US" smtClean="0"/>
-              <a:t>5/19/2026</a:t>
+              <a:t>5/20/2026</a:t>
             </a:fld>
             <a:endParaRPr lang="en-US"/>
           </a:p>
@@ -2506,7 +2506,7 @@
           <a:p>
             <a:fld id="{846CE7D5-CF57-46EF-B807-FDD0502418D4}" type="datetimeFigureOut">
               <a:rPr lang="en-US" smtClean="0"/>
-              <a:t>5/19/2026</a:t>
+              <a:t>5/20/2026</a:t>
             </a:fld>
             <a:endParaRPr lang="en-US"/>
           </a:p>
@@ -2601,7 +2601,7 @@
           <a:p>
             <a:fld id="{846CE7D5-CF57-46EF-B807-FDD0502418D4}" type="datetimeFigureOut">
               <a:rPr lang="en-US" smtClean="0"/>
-              <a:t>5/19/2026</a:t>
+              <a:t>5/20/2026</a:t>
             </a:fld>
             <a:endParaRPr lang="en-US"/>
           </a:p>
@@ -2878,7 +2878,7 @@
           <a:p>
             <a:fld id="{846CE7D5-CF57-46EF-B807-FDD0502418D4}" type="datetimeFigureOut">
               <a:rPr lang="en-US" smtClean="0"/>
-              <a:t>5/19/2026</a:t>
+              <a:t>5/20/2026</a:t>
             </a:fld>
             <a:endParaRPr lang="en-US"/>
           </a:p>
@@ -3135,7 +3135,7 @@
           <a:p>
             <a:fld id="{846CE7D5-CF57-46EF-B807-FDD0502418D4}" type="datetimeFigureOut">
               <a:rPr lang="en-US" smtClean="0"/>
-              <a:t>5/19/2026</a:t>
+              <a:t>5/20/2026</a:t>
             </a:fld>
             <a:endParaRPr lang="en-US"/>
           </a:p>
@@ -3348,7 +3348,7 @@
           <a:p>
             <a:fld id="{846CE7D5-CF57-46EF-B807-FDD0502418D4}" type="datetimeFigureOut">
               <a:rPr lang="en-US" smtClean="0"/>
-              <a:t>5/19/2026</a:t>
+              <a:t>5/20/2026</a:t>
             </a:fld>
             <a:endParaRPr lang="en-US"/>
           </a:p>
@@ -6232,7 +6232,7 @@
                   <a:srgbClr val="0070C0"/>
                 </a:solidFill>
               </a:rPr>
-              <a:t>" color=“red"&gt;&lt;/a-box&gt;</a:t>
+              <a:t>" color="red"&gt;&lt;/a-box&gt;</a:t>
             </a:r>
           </a:p>
           <a:p>
@@ -6482,7 +6482,12 @@
             <p:ph idx="1"/>
           </p:nvPr>
         </p:nvSpPr>
-        <p:spPr/>
+        <p:spPr>
+          <a:xfrm>
+            <a:off x="838200" y="1825625"/>
+            <a:ext cx="11074758" cy="4351338"/>
+          </a:xfrm>
+        </p:spPr>
         <p:txBody>
           <a:bodyPr>
             <a:normAutofit lnSpcReduction="10000"/>
@@ -7946,7 +7951,7 @@
         <p:spPr>
           <a:xfrm>
             <a:off x="858539" y="4781333"/>
-            <a:ext cx="8268033" cy="954107"/>
+            <a:ext cx="8080482" cy="1384995"/>
           </a:xfrm>
           <a:prstGeom prst="rect">
             <a:avLst/>
@@ -7958,6 +7963,16 @@
             <a:spAutoFit/>
           </a:bodyPr>
           <a:lstStyle/>
+          <a:p>
+            <a:r>
+              <a:rPr lang="en-US" sz="2800" b="1" dirty="0"/>
+              <a:t>Stereopsis</a:t>
+            </a:r>
+            <a:r>
+              <a:rPr lang="en-US" sz="2800" dirty="0"/>
+              <a:t> – slightly different images for each eye</a:t>
+            </a:r>
+          </a:p>
           <a:p>
             <a:r>
               <a:rPr lang="en-US" sz="2800" dirty="0"/>
